--- a/presentaciones-html/clase-4/clase-4.pptx
+++ b/presentaciones-html/clase-4/clase-4.pptx
@@ -6215,7 +6215,7 @@
                 </a:solidFill>
                 <a:latin typeface="Calibri"/>
               </a:rPr>
-              <a:t>INGENIERÍA DE SOFTWARE I</a:t>
+              <a:t>Ingeniería de Software I</a:t>
             </a:r>
           </a:p>
         </p:txBody>
@@ -6285,7 +6285,7 @@
                 </a:solidFill>
                 <a:latin typeface="Calibri"/>
               </a:rPr>
-              <a:t>INGENIERÍA DE SOFTWARE I</a:t>
+              <a:t>UNIDAD IV – CASOS DE USO Y ESPECIFICACIÓN DE CASOS DE USO</a:t>
             </a:r>
           </a:p>
         </p:txBody>
@@ -6299,41 +6299,6 @@
         <p:spPr>
           <a:xfrm>
             <a:off x="502920" y="2651760"/>
-            <a:ext cx="11155680" cy="457200"/>
-          </a:xfrm>
-          <a:prstGeom prst="rect">
-            <a:avLst/>
-          </a:prstGeom>
-          <a:noFill/>
-        </p:spPr>
-        <p:txBody>
-          <a:bodyPr wrap="square" anchor="t" lIns="0" rIns="0" tIns="0" bIns="0">
-            <a:spAutoFit/>
-          </a:bodyPr>
-          <a:lstStyle/>
-          <a:p>
-            <a:pPr algn="l"/>
-            <a:r>
-              <a:rPr sz="1900" b="1" i="0">
-                <a:solidFill>
-                  <a:srgbClr val="2C4A8A"/>
-                </a:solidFill>
-                <a:latin typeface="Calibri"/>
-              </a:rPr>
-              <a:t>UNIDAD IV – CASOS DE USO Y ESPECIFICACIÓN DE CASOS DE USO</a:t>
-            </a:r>
-          </a:p>
-        </p:txBody>
-      </p:sp>
-      <p:sp>
-        <p:nvSpPr>
-          <p:cNvPr id="11" name="TextBox 10"/>
-          <p:cNvSpPr txBox="1"/>
-          <p:nvPr/>
-        </p:nvSpPr>
-        <p:spPr>
-          <a:xfrm>
-            <a:off x="502920" y="3163824"/>
             <a:ext cx="11155680" cy="347472"/>
           </a:xfrm>
           <a:prstGeom prst="rect">
